--- a/top-criativos-meta.pptx
+++ b/top-criativos-meta.pptx
@@ -3367,7 +3367,7 @@
                 </a:solidFill>
                 <a:latin typeface="Calibri"/>
               </a:rPr>
-              <a:t>Gerado em 22/05/2026 17:40 · Festival Interlagos 2026</a:t>
+              <a:t>Gerado em 22/05/2026 18:02 · Festival Interlagos 2026</a:t>
             </a:r>
           </a:p>
         </p:txBody>

--- a/top-criativos-meta.pptx
+++ b/top-criativos-meta.pptx
@@ -3367,7 +3367,7 @@
                 </a:solidFill>
                 <a:latin typeface="Calibri"/>
               </a:rPr>
-              <a:t>Gerado em 22/05/2026 18:02 · Festival Interlagos 2026</a:t>
+              <a:t>Gerado em 22/05/2026 18:04 · Festival Interlagos 2026</a:t>
             </a:r>
           </a:p>
         </p:txBody>

--- a/top-criativos-meta.pptx
+++ b/top-criativos-meta.pptx
@@ -3367,7 +3367,7 @@
                 </a:solidFill>
                 <a:latin typeface="Calibri"/>
               </a:rPr>
-              <a:t>Gerado em 22/05/2026 18:04 · Festival Interlagos 2026</a:t>
+              <a:t>Gerado em 22/05/2026 18:06 · Festival Interlagos 2026</a:t>
             </a:r>
           </a:p>
         </p:txBody>
